--- a/media/exports/reports/2026-07/callbacks.pptx
+++ b/media/exports/reports/2026-07/callbacks.pptx
@@ -494,7 +494,7 @@
                   <c:v>54.8</c:v>
                 </c:pt>
                 <c:pt idx="1">
-                  <c:v>56.2</c:v>
+                  <c:v>56.3</c:v>
                 </c:pt>
                 <c:pt idx="2">
                   <c:v>63.6</c:v>
@@ -4543,7 +4543,7 @@
                 </a:solidFill>
                 <a:latin typeface="Roboto"/>
               </a:rPr>
-              <a:t>Data retrieved 2pm, Tue 6 Oct 2026 · Generated 8 Oct 2026, 6:28pm · Sample data · Made with Python (python-pptx)</a:t>
+              <a:t>Data retrieved 2pm, Tue 6 Oct 2026 · Generated 9 Oct 2026, 8:41am · Sample data · Made with Python (python-pptx)</a:t>
             </a:r>
           </a:p>
         </p:txBody>
@@ -5610,7 +5610,7 @@
                 </a:solidFill>
                 <a:latin typeface="Roboto"/>
               </a:rPr>
-              <a:t>Data retrieved 2pm, Tue 6 Oct 2026 · Generated 8 Oct 2026, 6:28pm · Sample data · Made with Python (python-pptx)</a:t>
+              <a:t>Data retrieved 2pm, Tue 6 Oct 2026 · Generated 9 Oct 2026, 8:41am · Sample data · Made with Python (python-pptx)</a:t>
             </a:r>
           </a:p>
         </p:txBody>
@@ -6039,7 +6039,7 @@
                 </a:solidFill>
                 <a:latin typeface="Roboto"/>
               </a:rPr>
-              <a:t>Data retrieved 2pm, Tue 6 Oct 2026 · Generated 8 Oct 2026, 6:28pm · Sample data · Made with Python (python-pptx)</a:t>
+              <a:t>Data retrieved 2pm, Tue 6 Oct 2026 · Generated 9 Oct 2026, 8:41am · Sample data · Made with Python (python-pptx)</a:t>
             </a:r>
           </a:p>
         </p:txBody>

--- a/media/exports/reports/2026-07/callbacks.pptx
+++ b/media/exports/reports/2026-07/callbacks.pptx
@@ -988,7 +988,7 @@
           <a:lstStyle/>
           <a:p>
             <a:r>
-              <a:t>How long do customers wait for a callback?. Sample Electrical &amp; Air Pty Ltd. Period: July 2026. Every customer enquiry (phone, web form, email) and how long until someone first called back, in working minutes. Every call-out job has the enquiry that booked it.</a:t>
+              <a:t>How long do customers wait for a callback?. Sample Electrical &amp; Air Pty Ltd. Period: July 2026. In short: 57.4% called back within 2 working hours in July (target 80.0%); median wait 92 working minutes. Every customer enquiry (phone, web form, email) and how long until someone first called back, in working minutes. Every call-out job has the enquiry that booked it.</a:t>
             </a:r>
           </a:p>
         </p:txBody>
@@ -4353,7 +4353,7 @@
         <p:spPr>
           <a:xfrm>
             <a:off x="457200" y="3703320"/>
-            <a:ext cx="11277295" cy="535940"/>
+            <a:ext cx="11277295" cy="758190"/>
           </a:xfrm>
           <a:prstGeom prst="rect">
             <a:avLst/>
@@ -4378,7 +4378,7 @@
                 </a:solidFill>
                 <a:latin typeface="Roboto"/>
               </a:rPr>
-              <a:t>Period: July 2026. Every customer enquiry (phone, web form, email) and how long until someone first called back, in working minutes. Every call-out job has the enquiry that booked it.</a:t>
+              <a:t>Period: July 2026. In short: 57.4% called back within 2 working hours in July (target 80.0%); median wait 92 working minutes. Every customer enquiry (phone, web form, email) and how long until someone first called back, in working minutes. Every call-out job has the enquiry that booked it.</a:t>
             </a:r>
           </a:p>
         </p:txBody>
@@ -4391,7 +4391,7 @@
         </p:nvSpPr>
         <p:spPr>
           <a:xfrm>
-            <a:off x="457200" y="4330700"/>
+            <a:off x="457200" y="4552950"/>
             <a:ext cx="11277295" cy="1097280"/>
           </a:xfrm>
           <a:prstGeom prst="rect">
@@ -4543,7 +4543,7 @@
                 </a:solidFill>
                 <a:latin typeface="Roboto"/>
               </a:rPr>
-              <a:t>Data retrieved 2pm, Tue 6 Oct 2026 · Generated 9 Oct 2026, 8:41am · Sample data · Made with Python (python-pptx)</a:t>
+              <a:t>Data retrieved 2pm, Tue 6 Oct 2026 · Generated 10 Oct 2026, 9:55pm · Sample data · Made with Python (python-pptx)</a:t>
             </a:r>
           </a:p>
         </p:txBody>
@@ -5610,7 +5610,7 @@
                 </a:solidFill>
                 <a:latin typeface="Roboto"/>
               </a:rPr>
-              <a:t>Data retrieved 2pm, Tue 6 Oct 2026 · Generated 9 Oct 2026, 8:41am · Sample data · Made with Python (python-pptx)</a:t>
+              <a:t>Data retrieved 2pm, Tue 6 Oct 2026 · Generated 10 Oct 2026, 9:55pm · Sample data · Made with Python (python-pptx)</a:t>
             </a:r>
           </a:p>
         </p:txBody>
@@ -6039,7 +6039,7 @@
                 </a:solidFill>
                 <a:latin typeface="Roboto"/>
               </a:rPr>
-              <a:t>Data retrieved 2pm, Tue 6 Oct 2026 · Generated 9 Oct 2026, 8:41am · Sample data · Made with Python (python-pptx)</a:t>
+              <a:t>Data retrieved 2pm, Tue 6 Oct 2026 · Generated 10 Oct 2026, 9:55pm · Sample data · Made with Python (python-pptx)</a:t>
             </a:r>
           </a:p>
         </p:txBody>
